--- a/cursos/recursos/el-mapa-de-los-finales/12-torre-contra-dos-peones.pptx
+++ b/cursos/recursos/el-mapa-de-los-finales/12-torre-contra-dos-peones.pptx
@@ -3676,7 +3676,7 @@
                 </a:solidFill>
                 <a:latin typeface="Georgia"/>
               </a:rPr>
-              <a:t>El rey fuerte de lado: comprobalo</a:t>
+              <a:t>El rey fuerte de lado: compruébalo</a:t>
             </a:r>
           </a:p>
         </p:txBody>
@@ -3793,7 +3793,7 @@
                 </a:solidFill>
                 <a:latin typeface="Calibri"/>
               </a:rPr>
-              <a:t>Ejercicio: verificá que también es tablas.</a:t>
+              <a:t>Ejercicio: verifica que también es tablas.</a:t>
             </a:r>
           </a:p>
         </p:txBody>
@@ -5302,7 +5302,7 @@
                 </a:solidFill>
                 <a:latin typeface="Calibri"/>
               </a:rPr>
-              <a:t>Reproducí la serie de jaques del Final 32 desde la posición crítica hasta las tablas.</a:t>
+              <a:t>Reproduce la serie de jaques del Final 32 desde la posición crítica hasta las tablas.</a:t>
             </a:r>
           </a:p>
           <a:p>
@@ -5373,7 +5373,7 @@
                 </a:solidFill>
                 <a:latin typeface="Calibri"/>
               </a:rPr>
-              <a:t>•  Recorré cada línea principal hasta entender el porqué de cada jugada.</a:t>
+              <a:t>•  Recorre cada línea principal hasta entender el porqué de cada jugada.</a:t>
             </a:r>
           </a:p>
           <a:p>
@@ -5389,7 +5389,7 @@
                 </a:solidFill>
                 <a:latin typeface="Calibri"/>
               </a:rPr>
-              <a:t>•  Practicá primero las posiciones clave, después las demás.</a:t>
+              <a:t>•  Practica primero las posiciones clave, después las demás.</a:t>
             </a:r>
           </a:p>
           <a:p>
@@ -5405,7 +5405,7 @@
                 </a:solidFill>
                 <a:latin typeface="Calibri"/>
               </a:rPr>
-              <a:t>•  Anotá las reglas de cada final con tus palabras.</a:t>
+              <a:t>•  Anota las reglas de cada final con tus palabras.</a:t>
             </a:r>
           </a:p>
         </p:txBody>
